--- a/Number System Conversion.pptx
+++ b/Number System Conversion.pptx
@@ -343,7 +343,7 @@
           <a:p>
             <a:fld id="{F666E1FD-E7A0-497B-BBC0-740BAAC97C64}" type="datetimeFigureOut">
               <a:rPr lang="en-PH" smtClean="0"/>
-              <a:t>18/09/2026</a:t>
+              <a:t>25/09/2026</a:t>
             </a:fld>
             <a:endParaRPr lang="en-PH"/>
           </a:p>
@@ -2356,7 +2356,7 @@
           <a:p>
             <a:fld id="{0CCF0B81-6BD8-4C65-9459-815598C5F1F4}" type="datetimeFigureOut">
               <a:rPr lang="en-PH" smtClean="0"/>
-              <a:t>18/09/2026</a:t>
+              <a:t>25/09/2026</a:t>
             </a:fld>
             <a:endParaRPr lang="en-PH"/>
           </a:p>
@@ -2556,7 +2556,7 @@
           <a:p>
             <a:fld id="{0CCF0B81-6BD8-4C65-9459-815598C5F1F4}" type="datetimeFigureOut">
               <a:rPr lang="en-PH" smtClean="0"/>
-              <a:t>18/09/2026</a:t>
+              <a:t>25/09/2026</a:t>
             </a:fld>
             <a:endParaRPr lang="en-PH"/>
           </a:p>
@@ -2766,7 +2766,7 @@
           <a:p>
             <a:fld id="{0CCF0B81-6BD8-4C65-9459-815598C5F1F4}" type="datetimeFigureOut">
               <a:rPr lang="en-PH" smtClean="0"/>
-              <a:t>18/09/2026</a:t>
+              <a:t>25/09/2026</a:t>
             </a:fld>
             <a:endParaRPr lang="en-PH"/>
           </a:p>
@@ -2966,7 +2966,7 @@
           <a:p>
             <a:fld id="{0CCF0B81-6BD8-4C65-9459-815598C5F1F4}" type="datetimeFigureOut">
               <a:rPr lang="en-PH" smtClean="0"/>
-              <a:t>18/09/2026</a:t>
+              <a:t>25/09/2026</a:t>
             </a:fld>
             <a:endParaRPr lang="en-PH"/>
           </a:p>
@@ -3242,7 +3242,7 @@
           <a:p>
             <a:fld id="{0CCF0B81-6BD8-4C65-9459-815598C5F1F4}" type="datetimeFigureOut">
               <a:rPr lang="en-PH" smtClean="0"/>
-              <a:t>18/09/2026</a:t>
+              <a:t>25/09/2026</a:t>
             </a:fld>
             <a:endParaRPr lang="en-PH"/>
           </a:p>
@@ -3510,7 +3510,7 @@
           <a:p>
             <a:fld id="{0CCF0B81-6BD8-4C65-9459-815598C5F1F4}" type="datetimeFigureOut">
               <a:rPr lang="en-PH" smtClean="0"/>
-              <a:t>18/09/2026</a:t>
+              <a:t>25/09/2026</a:t>
             </a:fld>
             <a:endParaRPr lang="en-PH"/>
           </a:p>
@@ -3925,7 +3925,7 @@
           <a:p>
             <a:fld id="{0CCF0B81-6BD8-4C65-9459-815598C5F1F4}" type="datetimeFigureOut">
               <a:rPr lang="en-PH" smtClean="0"/>
-              <a:t>18/09/2026</a:t>
+              <a:t>25/09/2026</a:t>
             </a:fld>
             <a:endParaRPr lang="en-PH"/>
           </a:p>
@@ -4067,7 +4067,7 @@
           <a:p>
             <a:fld id="{0CCF0B81-6BD8-4C65-9459-815598C5F1F4}" type="datetimeFigureOut">
               <a:rPr lang="en-PH" smtClean="0"/>
-              <a:t>18/09/2026</a:t>
+              <a:t>25/09/2026</a:t>
             </a:fld>
             <a:endParaRPr lang="en-PH"/>
           </a:p>
@@ -4180,7 +4180,7 @@
           <a:p>
             <a:fld id="{0CCF0B81-6BD8-4C65-9459-815598C5F1F4}" type="datetimeFigureOut">
               <a:rPr lang="en-PH" smtClean="0"/>
-              <a:t>18/09/2026</a:t>
+              <a:t>25/09/2026</a:t>
             </a:fld>
             <a:endParaRPr lang="en-PH"/>
           </a:p>
@@ -4493,7 +4493,7 @@
           <a:p>
             <a:fld id="{0CCF0B81-6BD8-4C65-9459-815598C5F1F4}" type="datetimeFigureOut">
               <a:rPr lang="en-PH" smtClean="0"/>
-              <a:t>18/09/2026</a:t>
+              <a:t>25/09/2026</a:t>
             </a:fld>
             <a:endParaRPr lang="en-PH"/>
           </a:p>
@@ -4782,7 +4782,7 @@
           <a:p>
             <a:fld id="{0CCF0B81-6BD8-4C65-9459-815598C5F1F4}" type="datetimeFigureOut">
               <a:rPr lang="en-PH" smtClean="0"/>
-              <a:t>18/09/2026</a:t>
+              <a:t>25/09/2026</a:t>
             </a:fld>
             <a:endParaRPr lang="en-PH"/>
           </a:p>
@@ -5025,7 +5025,7 @@
           <a:p>
             <a:fld id="{0CCF0B81-6BD8-4C65-9459-815598C5F1F4}" type="datetimeFigureOut">
               <a:rPr lang="en-PH" smtClean="0"/>
-              <a:t>18/09/2026</a:t>
+              <a:t>25/09/2026</a:t>
             </a:fld>
             <a:endParaRPr lang="en-PH"/>
           </a:p>
@@ -6473,7 +6473,7 @@
                     <m:sSup>
                       <m:sSupPr>
                         <m:ctrlPr>
-                          <a:rPr lang="en-US" sz="2000" i="1" smtClean="0">
+                          <a:rPr lang="en-GB" sz="2000" b="0" i="1" smtClean="0">
                             <a:latin typeface="Cambria Math" panose="02040503050406030204" pitchFamily="18" charset="0"/>
                           </a:rPr>
                         </m:ctrlPr>
@@ -6633,7 +6633,7 @@
                     <m:sSup>
                       <m:sSupPr>
                         <m:ctrlPr>
-                          <a:rPr lang="en-US" sz="2000" i="1" smtClean="0">
+                          <a:rPr lang="en-GB" sz="2000" b="0" i="1" smtClean="0">
                             <a:latin typeface="Cambria Math" panose="02040503050406030204" pitchFamily="18" charset="0"/>
                           </a:rPr>
                         </m:ctrlPr>
@@ -6793,7 +6793,7 @@
                     <m:sSup>
                       <m:sSupPr>
                         <m:ctrlPr>
-                          <a:rPr lang="en-US" sz="2000" i="1" smtClean="0">
+                          <a:rPr lang="en-GB" sz="2000" b="0" i="1" smtClean="0">
                             <a:latin typeface="Cambria Math" panose="02040503050406030204" pitchFamily="18" charset="0"/>
                           </a:rPr>
                         </m:ctrlPr>
@@ -6953,7 +6953,7 @@
                     <m:sSup>
                       <m:sSupPr>
                         <m:ctrlPr>
-                          <a:rPr lang="en-US" sz="2000" i="1" smtClean="0">
+                          <a:rPr lang="en-GB" sz="2000" b="0" i="1" smtClean="0">
                             <a:latin typeface="Cambria Math" panose="02040503050406030204" pitchFamily="18" charset="0"/>
                           </a:rPr>
                         </m:ctrlPr>
@@ -7113,7 +7113,7 @@
                     <m:sSup>
                       <m:sSupPr>
                         <m:ctrlPr>
-                          <a:rPr lang="en-US" sz="2000" i="1" smtClean="0">
+                          <a:rPr lang="en-GB" sz="2000" b="0" i="1" smtClean="0">
                             <a:latin typeface="Cambria Math" panose="02040503050406030204" pitchFamily="18" charset="0"/>
                           </a:rPr>
                         </m:ctrlPr>
@@ -7273,7 +7273,7 @@
                     <m:sSup>
                       <m:sSupPr>
                         <m:ctrlPr>
-                          <a:rPr lang="en-US" sz="2000" i="1" smtClean="0">
+                          <a:rPr lang="en-GB" sz="2000" b="0" i="1" smtClean="0">
                             <a:latin typeface="Cambria Math" panose="02040503050406030204" pitchFamily="18" charset="0"/>
                           </a:rPr>
                         </m:ctrlPr>
@@ -9728,8 +9728,8 @@
           </a:fontRef>
         </p:style>
       </p:cxnSp>
-      <mc:AlternateContent xmlns:mc="http://schemas.openxmlformats.org/markup-compatibility/2006" xmlns:a14="http://schemas.microsoft.com/office/drawing/2010/main">
-        <mc:Choice Requires="a14">
+      <mc:AlternateContent xmlns:mc="http://schemas.openxmlformats.org/markup-compatibility/2006">
+        <mc:Choice xmlns:a14="http://schemas.microsoft.com/office/drawing/2010/main" Requires="a14">
           <p:sp>
             <p:nvSpPr>
               <p:cNvPr id="88" name="TextBox 87">
@@ -9745,7 +9745,7 @@
             <p:spPr>
               <a:xfrm>
                 <a:off x="7207173" y="5762813"/>
-                <a:ext cx="2952824" cy="553998"/>
+                <a:ext cx="3094214" cy="553998"/>
               </a:xfrm>
               <a:prstGeom prst="rect">
                 <a:avLst/>
@@ -9789,6 +9789,15 @@
                           </a:rPr>
                           <m:t>𝟏𝟎𝟑𝟒</m:t>
                         </m:r>
+                        <m:r>
+                          <a:rPr lang="en-PH" sz="3000" b="1" i="1" smtClean="0">
+                            <a:solidFill>
+                              <a:srgbClr val="00B050"/>
+                            </a:solidFill>
+                            <a:latin typeface="Cambria Math" panose="02040503050406030204" pitchFamily="18" charset="0"/>
+                          </a:rPr>
+                          <m:t>𝟎</m:t>
+                        </m:r>
                       </m:e>
                       <m:sub>
                         <m:r>
@@ -9813,7 +9822,7 @@
             </p:txBody>
           </p:sp>
         </mc:Choice>
-        <mc:Fallback xmlns="">
+        <mc:Fallback>
           <p:sp>
             <p:nvSpPr>
               <p:cNvPr id="88" name="TextBox 87">
@@ -9831,15 +9840,15 @@
             <p:spPr>
               <a:xfrm>
                 <a:off x="7207173" y="5762813"/>
-                <a:ext cx="2952824" cy="553998"/>
+                <a:ext cx="3094214" cy="553998"/>
               </a:xfrm>
               <a:prstGeom prst="rect">
                 <a:avLst/>
               </a:prstGeom>
               <a:blipFill>
-                <a:blip r:embed="rId4"/>
+                <a:blip r:embed="rId3"/>
                 <a:stretch>
-                  <a:fillRect l="-4701" t="-11111" b="-31111"/>
+                  <a:fillRect l="-4528" t="-13187" b="-34066"/>
                 </a:stretch>
               </a:blipFill>
             </p:spPr>
@@ -9848,7 +9857,7 @@
               <a:lstStyle/>
               <a:p>
                 <a:r>
-                  <a:rPr lang="en-US">
+                  <a:rPr lang="en-PH">
                     <a:noFill/>
                   </a:rPr>
                   <a:t> </a:t>
@@ -9873,7 +9882,7 @@
           <p:nvPr/>
         </p:nvPicPr>
         <p:blipFill>
-          <a:blip r:embed="rId5">
+          <a:blip r:embed="rId4">
             <a:extLst>
               <a:ext uri="{28A0092B-C50C-407E-A947-70E740481C1C}">
                 <a14:useLocalDpi xmlns:a14="http://schemas.microsoft.com/office/drawing/2010/main" val="0"/>
@@ -10764,7 +10773,13 @@
               <a:rPr lang="en-GB" sz="5400" b="1" dirty="0">
                 <a:latin typeface="Calibri Light (Headings)"/>
               </a:rPr>
-              <a:t>Binary to Hexadecimal</a:t>
+              <a:t>Binary </a:t>
+            </a:r>
+            <a:r>
+              <a:rPr lang="en-GB" sz="5400" b="1">
+                <a:latin typeface="Calibri Light (Headings)"/>
+              </a:rPr>
+              <a:t>to Decimal</a:t>
             </a:r>
             <a:endParaRPr lang="en-PH" sz="5000" b="1" dirty="0">
               <a:latin typeface="Calibri Light (Headings)"/>
@@ -10855,7 +10870,7 @@
                     <m:sSup>
                       <m:sSupPr>
                         <m:ctrlPr>
-                          <a:rPr lang="en-US" sz="1600" i="1" smtClean="0">
+                          <a:rPr lang="en-GB" sz="1600" b="0" i="1" smtClean="0">
                             <a:latin typeface="Cambria Math" panose="02040503050406030204" pitchFamily="18" charset="0"/>
                           </a:rPr>
                         </m:ctrlPr>
@@ -11015,7 +11030,7 @@
                     <m:sSup>
                       <m:sSupPr>
                         <m:ctrlPr>
-                          <a:rPr lang="en-US" sz="1600" i="1" smtClean="0">
+                          <a:rPr lang="en-GB" sz="1600" b="0" i="1" smtClean="0">
                             <a:latin typeface="Cambria Math" panose="02040503050406030204" pitchFamily="18" charset="0"/>
                           </a:rPr>
                         </m:ctrlPr>
@@ -11175,7 +11190,7 @@
                     <m:sSup>
                       <m:sSupPr>
                         <m:ctrlPr>
-                          <a:rPr lang="en-US" sz="1600" i="1" smtClean="0">
+                          <a:rPr lang="en-GB" sz="1600" b="0" i="1" smtClean="0">
                             <a:latin typeface="Cambria Math" panose="02040503050406030204" pitchFamily="18" charset="0"/>
                           </a:rPr>
                         </m:ctrlPr>
@@ -11335,7 +11350,7 @@
                     <m:sSup>
                       <m:sSupPr>
                         <m:ctrlPr>
-                          <a:rPr lang="en-US" sz="1600" i="1" smtClean="0">
+                          <a:rPr lang="en-GB" sz="1600" b="0" i="1" smtClean="0">
                             <a:latin typeface="Cambria Math" panose="02040503050406030204" pitchFamily="18" charset="0"/>
                           </a:rPr>
                         </m:ctrlPr>
@@ -11495,7 +11510,7 @@
                     <m:sSup>
                       <m:sSupPr>
                         <m:ctrlPr>
-                          <a:rPr lang="en-US" sz="1600" i="1" smtClean="0">
+                          <a:rPr lang="en-GB" sz="1600" b="0" i="1" smtClean="0">
                             <a:latin typeface="Cambria Math" panose="02040503050406030204" pitchFamily="18" charset="0"/>
                           </a:rPr>
                         </m:ctrlPr>
@@ -11655,7 +11670,7 @@
                     <m:sSup>
                       <m:sSupPr>
                         <m:ctrlPr>
-                          <a:rPr lang="en-US" sz="1600" i="1" smtClean="0">
+                          <a:rPr lang="en-GB" sz="1600" b="0" i="1" smtClean="0">
                             <a:latin typeface="Cambria Math" panose="02040503050406030204" pitchFamily="18" charset="0"/>
                           </a:rPr>
                         </m:ctrlPr>
@@ -12375,7 +12390,7 @@
                     <m:sSup>
                       <m:sSupPr>
                         <m:ctrlPr>
-                          <a:rPr lang="en-US" sz="1600" i="1" smtClean="0">
+                          <a:rPr lang="en-GB" sz="1600" b="0" i="1" smtClean="0">
                             <a:latin typeface="Cambria Math" panose="02040503050406030204" pitchFamily="18" charset="0"/>
                           </a:rPr>
                         </m:ctrlPr>
@@ -12535,7 +12550,7 @@
                     <m:sSup>
                       <m:sSupPr>
                         <m:ctrlPr>
-                          <a:rPr lang="en-US" sz="1600" i="1" smtClean="0">
+                          <a:rPr lang="en-GB" sz="1600" b="0" i="1" smtClean="0">
                             <a:latin typeface="Cambria Math" panose="02040503050406030204" pitchFamily="18" charset="0"/>
                           </a:rPr>
                         </m:ctrlPr>
@@ -12695,7 +12710,7 @@
                     <m:sSup>
                       <m:sSupPr>
                         <m:ctrlPr>
-                          <a:rPr lang="en-US" sz="1600" i="1" smtClean="0">
+                          <a:rPr lang="en-GB" sz="1600" b="0" i="1" smtClean="0">
                             <a:latin typeface="Cambria Math" panose="02040503050406030204" pitchFamily="18" charset="0"/>
                           </a:rPr>
                         </m:ctrlPr>
@@ -12855,7 +12870,7 @@
                     <m:sSup>
                       <m:sSupPr>
                         <m:ctrlPr>
-                          <a:rPr lang="en-US" sz="1600" i="1" smtClean="0">
+                          <a:rPr lang="en-GB" sz="1600" b="0" i="1" smtClean="0">
                             <a:latin typeface="Cambria Math" panose="02040503050406030204" pitchFamily="18" charset="0"/>
                           </a:rPr>
                         </m:ctrlPr>
@@ -13876,7 +13891,7 @@
         <p:spPr>
           <a:xfrm>
             <a:off x="598964" y="1511070"/>
-            <a:ext cx="11133827" cy="4154984"/>
+            <a:ext cx="11133827" cy="3416320"/>
           </a:xfrm>
           <a:prstGeom prst="rect">
             <a:avLst/>
@@ -13950,22 +13965,7 @@
             </a:r>
           </a:p>
           <a:p>
-            <a:pPr marL="342900" indent="-342900">
-              <a:buFont typeface="Wingdings" pitchFamily="2" charset="2"/>
-              <a:buChar char="§"/>
-            </a:pPr>
             <a:endParaRPr lang="en-PH" sz="2400" dirty="0"/>
-          </a:p>
-          <a:p>
-            <a:pPr marL="342900" indent="-342900">
-              <a:buFont typeface="Wingdings" pitchFamily="2" charset="2"/>
-              <a:buChar char="§"/>
-            </a:pPr>
-            <a:r>
-              <a:rPr lang="en-PH" sz="2400" dirty="0"/>
-              <a:t> For example: 100012, 1111012, 10101012 are some examples of numbers in the binary number system.</a:t>
-            </a:r>
-            <a:endParaRPr lang="en-US" sz="2400" dirty="0"/>
           </a:p>
         </p:txBody>
       </p:sp>
@@ -16385,14 +16385,11 @@
                 <a:pPr/>
                 <a14:m>
                   <m:oMathPara xmlns:m="http://schemas.openxmlformats.org/officeDocument/2006/math">
-                    <m:oMathParaPr>
-                      <m:jc m:val="centerGroup"/>
-                    </m:oMathParaPr>
-                    <m:oMath xmlns:m="http://schemas.openxmlformats.org/officeDocument/2006/math">
+                    <m:oMath>
                       <m:sSub>
                         <m:sSubPr>
                           <m:ctrlPr>
-                            <a:rPr lang="en-US" sz="10000" i="1" smtClean="0">
+                            <a:rPr lang="en-GB" sz="10000" b="0" i="1" smtClean="0">
                               <a:latin typeface="Cambria Math" panose="02040503050406030204" pitchFamily="18" charset="0"/>
                             </a:rPr>
                           </m:ctrlPr>
@@ -17479,14 +17476,11 @@
                 <a:pPr/>
                 <a14:m>
                   <m:oMathPara xmlns:m="http://schemas.openxmlformats.org/officeDocument/2006/math">
-                    <m:oMathParaPr>
-                      <m:jc m:val="centerGroup"/>
-                    </m:oMathParaPr>
-                    <m:oMath xmlns:m="http://schemas.openxmlformats.org/officeDocument/2006/math">
+                    <m:oMath>
                       <m:sSub>
                         <m:sSubPr>
                           <m:ctrlPr>
-                            <a:rPr lang="en-US" sz="7000" i="1" smtClean="0">
+                            <a:rPr lang="en-GB" sz="7000" b="0" i="1" smtClean="0">
                               <a:latin typeface="Cambria Math" panose="02040503050406030204" pitchFamily="18" charset="0"/>
                             </a:rPr>
                           </m:ctrlPr>
@@ -18234,7 +18228,7 @@
                 <a:effectLst/>
                 <a:latin typeface="-apple-system"/>
               </a:rPr>
-              <a:t>A decimal number system is also called the </a:t>
+              <a:t>A octal number system is also called the </a:t>
             </a:r>
             <a:r>
               <a:rPr lang="en-PH" sz="2400" b="1" i="0" u="none" strike="noStrike" dirty="0">
@@ -18587,14 +18581,11 @@
                 <a:pPr/>
                 <a14:m>
                   <m:oMathPara xmlns:m="http://schemas.openxmlformats.org/officeDocument/2006/math">
-                    <m:oMathParaPr>
-                      <m:jc m:val="centerGroup"/>
-                    </m:oMathParaPr>
-                    <m:oMath xmlns:m="http://schemas.openxmlformats.org/officeDocument/2006/math">
+                    <m:oMath>
                       <m:sSub>
                         <m:sSubPr>
                           <m:ctrlPr>
-                            <a:rPr lang="en-US" sz="7000" i="1" smtClean="0">
+                            <a:rPr lang="en-GB" sz="7000" b="0" i="1" smtClean="0">
                               <a:latin typeface="Cambria Math" panose="02040503050406030204" pitchFamily="18" charset="0"/>
                             </a:rPr>
                           </m:ctrlPr>
@@ -19847,14 +19838,11 @@
                 <a:pPr/>
                 <a14:m>
                   <m:oMathPara xmlns:m="http://schemas.openxmlformats.org/officeDocument/2006/math">
-                    <m:oMathParaPr>
-                      <m:jc m:val="centerGroup"/>
-                    </m:oMathParaPr>
-                    <m:oMath xmlns:m="http://schemas.openxmlformats.org/officeDocument/2006/math">
+                    <m:oMath>
                       <m:sSub>
                         <m:sSubPr>
                           <m:ctrlPr>
-                            <a:rPr lang="en-US" sz="7000" i="1" smtClean="0">
+                            <a:rPr lang="en-GB" sz="7000" b="0" i="0" smtClean="0">
                               <a:latin typeface="Cambria Math" panose="02040503050406030204" pitchFamily="18" charset="0"/>
                             </a:rPr>
                           </m:ctrlPr>
@@ -22233,14 +22221,11 @@
                           <a:pPr algn="ctr"/>
                           <a14:m>
                             <m:oMathPara xmlns:m="http://schemas.openxmlformats.org/officeDocument/2006/math">
-                              <m:oMathParaPr>
-                                <m:jc m:val="centerGroup"/>
-                              </m:oMathParaPr>
-                              <m:oMath xmlns:m="http://schemas.openxmlformats.org/officeDocument/2006/math">
+                              <m:oMath>
                                 <m:sSub>
                                   <m:sSubPr>
                                     <m:ctrlPr>
-                                      <a:rPr lang="en-US" sz="2100" i="1" smtClean="0">
+                                      <a:rPr lang="en-GB" sz="2100" b="0" i="1" smtClean="0">
                                         <a:latin typeface="Cambria Math" panose="02040503050406030204" pitchFamily="18" charset="0"/>
                                       </a:rPr>
                                     </m:ctrlPr>
@@ -22327,14 +22312,11 @@
                           <a:pPr algn="ctr"/>
                           <a14:m>
                             <m:oMathPara xmlns:m="http://schemas.openxmlformats.org/officeDocument/2006/math">
-                              <m:oMathParaPr>
-                                <m:jc m:val="centerGroup"/>
-                              </m:oMathParaPr>
-                              <m:oMath xmlns:m="http://schemas.openxmlformats.org/officeDocument/2006/math">
+                              <m:oMath>
                                 <m:sSub>
                                   <m:sSubPr>
                                     <m:ctrlPr>
-                                      <a:rPr lang="en-US" sz="2100" i="1" smtClean="0">
+                                      <a:rPr lang="en-GB" sz="2100" b="0" i="1" smtClean="0">
                                         <a:latin typeface="Cambria Math" panose="02040503050406030204" pitchFamily="18" charset="0"/>
                                       </a:rPr>
                                     </m:ctrlPr>
@@ -22421,14 +22403,11 @@
                           <a:pPr algn="ctr"/>
                           <a14:m>
                             <m:oMathPara xmlns:m="http://schemas.openxmlformats.org/officeDocument/2006/math">
-                              <m:oMathParaPr>
-                                <m:jc m:val="centerGroup"/>
-                              </m:oMathParaPr>
-                              <m:oMath xmlns:m="http://schemas.openxmlformats.org/officeDocument/2006/math">
+                              <m:oMath>
                                 <m:sSub>
                                   <m:sSubPr>
                                     <m:ctrlPr>
-                                      <a:rPr lang="en-US" sz="2100" i="1" smtClean="0">
+                                      <a:rPr lang="en-GB" sz="2100" b="0" i="1" smtClean="0">
                                         <a:latin typeface="Cambria Math" panose="02040503050406030204" pitchFamily="18" charset="0"/>
                                       </a:rPr>
                                     </m:ctrlPr>
@@ -22538,14 +22517,11 @@
                           <a:pPr algn="ctr"/>
                           <a14:m>
                             <m:oMathPara xmlns:m="http://schemas.openxmlformats.org/officeDocument/2006/math">
-                              <m:oMathParaPr>
-                                <m:jc m:val="centerGroup"/>
-                              </m:oMathParaPr>
-                              <m:oMath xmlns:m="http://schemas.openxmlformats.org/officeDocument/2006/math">
+                              <m:oMath>
                                 <m:sSub>
                                   <m:sSubPr>
                                     <m:ctrlPr>
-                                      <a:rPr lang="en-US" sz="2100" i="1" smtClean="0">
+                                      <a:rPr lang="en-GB" sz="2100" b="0" i="0" smtClean="0">
                                         <a:latin typeface="Cambria Math" panose="02040503050406030204" pitchFamily="18" charset="0"/>
                                       </a:rPr>
                                     </m:ctrlPr>
